--- a/figures/dbond_gt_architecture.pptx
+++ b/figures/dbond_gt_architecture.pptx
@@ -1790,7 +1790,7 @@
                 <a:ea typeface="Segoe UI" pitchFamily="34" charset="-122"/>
                 <a:cs typeface="Segoe UI" pitchFamily="34" charset="-120"/>
               </a:rPr>
-              <a:t>Bidirectional sequence edges + distance edges (≤ 6) + global node;  ◆ = bond site (i, i+1)</a:t>
+              <a:t>Bidirectional sequence edges + distance edges (d_max=6, effective |i−j|≤5) + global node;  ◆ = bond site (i, i+1)</a:t>
             </a:r>
             <a:endParaRPr lang="en-US" sz="1200" dirty="0"/>
           </a:p>
@@ -1880,7 +1880,7 @@
                 <a:ea typeface="Segoe UI" pitchFamily="34" charset="-122"/>
                 <a:cs typeface="Segoe UI" pitchFamily="34" charset="-120"/>
               </a:rPr>
-              <a:t>sequence + charge, pep_mass,</a:t>
+              <a:t>sequence + charge, pep_mass, NCE</a:t>
             </a:r>
             <a:endParaRPr lang="en-US" sz="1250" dirty="0"/>
           </a:p>
@@ -1889,15 +1889,15 @@
               <a:buNone/>
             </a:pPr>
             <a:r>
-              <a:rPr lang="en-US" sz="1200" dirty="0">
-                <a:solidFill>
-                  <a:srgbClr val="1E293B"/>
-                </a:solidFill>
-                <a:latin typeface="Segoe UI" pitchFamily="34" charset="0"/>
-                <a:ea typeface="Segoe UI" pitchFamily="34" charset="-122"/>
-                <a:cs typeface="Segoe UI" pitchFamily="34" charset="-120"/>
-              </a:rPr>
-              <a:t>intensity, NCE, scan_num</a:t>
+              <a:rPr lang="en-US" sz="1100" dirty="0">
+                <a:solidFill>
+                  <a:srgbClr val="64748B"/>
+                </a:solidFill>
+                <a:latin typeface="Segoe UI" pitchFamily="34" charset="0"/>
+                <a:ea typeface="Segoe UI" pitchFamily="34" charset="-122"/>
+                <a:cs typeface="Segoe UI" pitchFamily="34" charset="-120"/>
+              </a:rPr>
+              <a:t>(pre-synthesis: no intensity / scan_num / rt)</a:t>
             </a:r>
             <a:endParaRPr lang="en-US" sz="1250" dirty="0"/>
           </a:p>
@@ -2094,7 +2094,7 @@
                 <a:ea typeface="Segoe UI" pitchFamily="34" charset="-122"/>
                 <a:cs typeface="Segoe UI" pitchFamily="34" charset="-120"/>
               </a:rPr>
-              <a:t>physicochem. (32) ⊕ state MLP (32)</a:t>
+              <a:t>physicochem. (32) ⊕ state MLP (charge, pep_mass)</a:t>
             </a:r>
             <a:endParaRPr lang="en-US" sz="1400" dirty="0"/>
           </a:p>
@@ -2111,7 +2111,7 @@
                 <a:ea typeface="Segoe UI" pitchFamily="34" charset="-122"/>
                 <a:cs typeface="Segoe UI" pitchFamily="34" charset="-120"/>
               </a:rPr>
-              <a:t>⊕ env MLP (32) → Linear+LN → h∈ℝ²⁵⁶</a:t>
+              <a:t>⊕ env MLP (NCE) → Linear+LN → h∈ℝ²⁵⁶</a:t>
             </a:r>
             <a:endParaRPr lang="en-US" sz="1400" dirty="0"/>
           </a:p>
@@ -2201,7 +2201,7 @@
                 <a:ea typeface="Segoe UI" pitchFamily="34" charset="-122"/>
                 <a:cs typeface="Segoe UI" pitchFamily="34" charset="-120"/>
               </a:rPr>
-              <a:t>type emb ⊕ distance emb ⊕ raw attrs (8-d)</a:t>
+              <a:t>type emb ⊕ distance emb ⊕ raw attrs (4-d: d, q, m, NCE)</a:t>
             </a:r>
             <a:endParaRPr lang="en-US" sz="1400" dirty="0"/>
           </a:p>
